--- a/舆论分析研究.pptx
+++ b/舆论分析研究.pptx
@@ -3445,7 +3445,36 @@
               </a:defRPr>
             </a:pPr>
             <a:r>
-              <a:t>传播网络结构特征</a:t>
+              <a:t>传播网络基础指标：</a:t>
+            </a:r>
+            <a:br/>
+            <a:r>
+              <a:t>• 节点数：40,902 | 边数：120,030</a:t>
+            </a:r>
+            <a:br/>
+            <a:r>
+              <a:t>• 网络密度：0.000072（稀疏网络特征）</a:t>
+            </a:r>
+            <a:br/>
+            <a:br/>
+            <a:r>
+              <a:t>核心发现：</a:t>
+            </a:r>
+            <a:br/>
+            <a:r>
+              <a:t>• 89.1% 节点位于最大连通分量</a:t>
+            </a:r>
+            <a:br/>
+            <a:r>
+              <a:t>• 存在 2,023 个连通分量（多社区结构）</a:t>
+            </a:r>
+            <a:br/>
+            <a:r>
+              <a:t>• 平均聚类系数：0.0303</a:t>
+            </a:r>
+            <a:br/>
+            <a:r>
+              <a:t>• 星型拓扑：核心用户占据绝对信息优势</a:t>
             </a:r>
           </a:p>
         </p:txBody>
@@ -4160,7 +4189,53 @@
               </a:defRPr>
             </a:pPr>
             <a:r>
-              <a:t>TOP 10 意见领袖</a:t>
+              <a:t>TOP 10 意见领袖（影响力得分排名）：</a:t>
+            </a:r>
+            <a:br/>
+            <a:br/>
+            <a:r>
+              <a:t>1. @takaichi_sanae（本人账号）| PageRank: 0.0226</a:t>
+            </a:r>
+            <a:br/>
+            <a:r>
+              <a:t>2. @ashitawawatashi | PageRank: 0.0018</a:t>
+            </a:r>
+            <a:br/>
+            <a:r>
+              <a:t>3. @47news_official（媒体账号）| PageRank: 0.0074</a:t>
+            </a:r>
+            <a:br/>
+            <a:r>
+              <a:t>4. @iloveyoulove777 | PageRank: 0.0020</a:t>
+            </a:r>
+            <a:br/>
+            <a:r>
+              <a:t>5. @cobta | PageRank: 0.0035</a:t>
+            </a:r>
+            <a:br/>
+            <a:r>
+              <a:t>6. @kazu10233147 | PageRank: 0.0019</a:t>
+            </a:r>
+            <a:br/>
+            <a:r>
+              <a:t>7. @Sankei_news（媒体账号）| PageRank: 0.0067</a:t>
+            </a:r>
+            <a:br/>
+            <a:r>
+              <a:t>8. @YahooNewsTopics | PageRank: 0.0048</a:t>
+            </a:r>
+            <a:br/>
+            <a:r>
+              <a:t>9. @nikkei | PageRank: 0.0044</a:t>
+            </a:r>
+            <a:br/>
+            <a:r>
+              <a:t>10. @TomoMachi | PageRank: 0.0014</a:t>
+            </a:r>
+            <a:br/>
+            <a:br/>
+            <a:r>
+              <a:t>三层结构：政治人物核心层 → 媒体中介层 → 高互动草根层</a:t>
             </a:r>
           </a:p>
         </p:txBody>
@@ -5713,63 +5788,15 @@
             <a:r>
               <a:t>• 正面情感：16.9%（8,431条）</a:t>
             </a:r>
-          </a:p>
-          <a:p>
-            <a:pPr>
-              <a:spcAft>
-                <a:spcPts val="1200"/>
-              </a:spcAft>
-              <a:defRPr sz="2000">
-                <a:solidFill>
-                  <a:srgbClr val="000000"/>
-                </a:solidFill>
-              </a:defRPr>
-            </a:pPr>
+            <a:br/>
             <a:r>
               <a:t>• 负面情感：5.1%（2,563条）</a:t>
             </a:r>
-          </a:p>
-          <a:p>
-            <a:pPr>
-              <a:spcAft>
-                <a:spcPts val="1200"/>
-              </a:spcAft>
-              <a:defRPr sz="2000">
-                <a:solidFill>
-                  <a:srgbClr val="000000"/>
-                </a:solidFill>
-              </a:defRPr>
-            </a:pPr>
+            <a:br/>
             <a:r>
               <a:t>• 正面:负面 = 3.3:1</a:t>
             </a:r>
-          </a:p>
-          <a:p>
-            <a:pPr>
-              <a:spcAft>
-                <a:spcPts val="1200"/>
-              </a:spcAft>
-              <a:defRPr sz="2000">
-                <a:solidFill>
-                  <a:srgbClr val="000000"/>
-                </a:solidFill>
-              </a:defRPr>
-            </a:pPr>
-            <a:r>
-              <a:t>• 平均情感得分：0.535（偏正面）</a:t>
-            </a:r>
-          </a:p>
-          <a:p>
-            <a:pPr>
-              <a:spcAft>
-                <a:spcPts val="1200"/>
-              </a:spcAft>
-              <a:defRPr sz="2000">
-                <a:solidFill>
-                  <a:srgbClr val="000000"/>
-                </a:solidFill>
-              </a:defRPr>
-            </a:pPr>
+            <a:br/>
             <a:r>
               <a:t>• 多数用户保持理性观望态度</a:t>
             </a:r>
@@ -6476,63 +6503,15 @@
             <a:r>
               <a:t>• 前端层：React 18 + Vite + Ant Design 5 + ECharts 5</a:t>
             </a:r>
-          </a:p>
-          <a:p>
-            <a:pPr>
-              <a:spcAft>
-                <a:spcPts val="1400"/>
-              </a:spcAft>
-              <a:defRPr sz="2200">
-                <a:solidFill>
-                  <a:srgbClr val="000000"/>
-                </a:solidFill>
-              </a:defRPr>
-            </a:pPr>
-            <a:r>
-              <a:t>• 后端层：FastAPI + Uvicorn</a:t>
-            </a:r>
-          </a:p>
-          <a:p>
-            <a:pPr>
-              <a:spcAft>
-                <a:spcPts val="1400"/>
-              </a:spcAft>
-              <a:defRPr sz="2200">
-                <a:solidFill>
-                  <a:srgbClr val="000000"/>
-                </a:solidFill>
-              </a:defRPr>
-            </a:pPr>
+            <a:br/>
             <a:r>
               <a:t>• 数据处理：Pandas, NumPy, NetworkX, Jieba</a:t>
             </a:r>
-          </a:p>
-          <a:p>
-            <a:pPr>
-              <a:spcAft>
-                <a:spcPts val="1400"/>
-              </a:spcAft>
-              <a:defRPr sz="2200">
-                <a:solidFill>
-                  <a:srgbClr val="000000"/>
-                </a:solidFill>
-              </a:defRPr>
-            </a:pPr>
+            <a:br/>
             <a:r>
               <a:t>• 功能模块：舆论概览 | 情感分析 | 话题分析 | 意见领袖 | 传播网络</a:t>
             </a:r>
-          </a:p>
-          <a:p>
-            <a:pPr>
-              <a:spcAft>
-                <a:spcPts val="1400"/>
-              </a:spcAft>
-              <a:defRPr sz="2200">
-                <a:solidFill>
-                  <a:srgbClr val="000000"/>
-                </a:solidFill>
-              </a:defRPr>
-            </a:pPr>
+            <a:br/>
             <a:r>
               <a:t>• 部署架构：CSV/JSON数据存储 + RESTful API</a:t>
             </a:r>
@@ -9213,50 +9192,43 @@
             <a:r>
               <a:t>• 传播网络分析：NetworkX构建有向图，分析度中心性、PageRank、介数中心性</a:t>
             </a:r>
-          </a:p>
-          <a:p>
-            <a:pPr>
-              <a:spcAft>
-                <a:spcPts val="1400"/>
-              </a:spcAft>
-              <a:defRPr sz="2200">
-                <a:solidFill>
-                  <a:srgbClr val="000000"/>
-                </a:solidFill>
-              </a:defRPr>
-            </a:pPr>
+            <a:br/>
             <a:r>
               <a:t>• 意见领袖识别：综合PageRank(40%)、介数中心性(30%)、度中心性(30%)的影响力评估模型</a:t>
             </a:r>
-          </a:p>
-          <a:p>
-            <a:pPr>
-              <a:spcAft>
-                <a:spcPts val="1400"/>
-              </a:spcAft>
-              <a:defRPr sz="2200">
-                <a:solidFill>
-                  <a:srgbClr val="000000"/>
-                </a:solidFill>
-              </a:defRPr>
-            </a:pPr>
+            <a:br/>
             <a:r>
               <a:t>• 情感分析：基于关键词匹配的情感分类（正面/中立/负面）</a:t>
             </a:r>
-          </a:p>
-          <a:p>
-            <a:pPr>
-              <a:spcAft>
-                <a:spcPts val="1400"/>
-              </a:spcAft>
-              <a:defRPr sz="2200">
-                <a:solidFill>
-                  <a:srgbClr val="000000"/>
-                </a:solidFill>
-              </a:defRPr>
-            </a:pPr>
+            <a:br/>
             <a:r>
               <a:t>• 话题聚类：话题标签频率统计 + jieba关键词提取 + 月度话题变化追踪</a:t>
+            </a:r>
+            <a:br/>
+            <a:br/>
+            <a:r>
+              <a:t>• 情感分析：关键词匹配分类</a:t>
+            </a:r>
+            <a:br/>
+            <a:r>
+              <a:t>  - 正面/中立/负面三分类</a:t>
+            </a:r>
+            <a:br/>
+            <a:r>
+              <a:t>  - 正负情感比值 3.3:1</a:t>
+            </a:r>
+            <a:br/>
+            <a:br/>
+            <a:r>
+              <a:t>• 话题聚类与时间分析</a:t>
+            </a:r>
+            <a:br/>
+            <a:r>
+              <a:t>  - Hashtag频率统计 + Jieba关键词提取</a:t>
+            </a:r>
+            <a:br/>
+            <a:r>
+              <a:t>  - 日/周/月三级时间粒度</a:t>
             </a:r>
           </a:p>
         </p:txBody>
